--- a/assets/templates/Project update.pptx
+++ b/assets/templates/Project update.pptx
@@ -3084,6 +3084,14 @@
 <file path=ppt/slides/slide1.xml><?xml version="1.0" encoding="utf-8"?>
 <p:sld xmlns:a="http://schemas.openxmlformats.org/drawingml/2006/main" xmlns:p="http://schemas.openxmlformats.org/presentationml/2006/main" xmlns:r="http://schemas.openxmlformats.org/officeDocument/2006/relationships">
   <p:cSld>
+    <p:bg>
+      <p:bgPr>
+        <a:solidFill>
+          <a:srgbClr val="0B0B0B"/>
+        </a:solidFill>
+        <a:effectLst/>
+      </p:bgPr>
+    </p:bg>
     <p:spTree>
       <p:nvGrpSpPr>
         <p:cNvPr id="1" name=""/>
@@ -3106,6 +3114,14 @@
           <a:bodyPr/>
           <a:lstStyle/>
           <a:p>
+            <a:pPr>
+              <a:defRPr sz="3200" b="1">
+                <a:solidFill>
+                  <a:srgbClr val="FFDD22"/>
+                </a:solidFill>
+                <a:latin typeface="Calibri"/>
+              </a:defRPr>
+            </a:pPr>
             <a:r>
               <a:t>Project update</a:t>
             </a:r>
@@ -3127,6 +3143,14 @@
           <a:bodyPr/>
           <a:lstStyle/>
           <a:p>
+            <a:pPr>
+              <a:defRPr sz="2000" b="0">
+                <a:solidFill>
+                  <a:srgbClr val="F2F2ED"/>
+                </a:solidFill>
+                <a:latin typeface="Calibri"/>
+              </a:defRPr>
+            </a:pPr>
             <a:r>
               <a:t>Project · Date</a:t>
             </a:r>
@@ -3144,6 +3168,14 @@
 <file path=ppt/slides/slide2.xml><?xml version="1.0" encoding="utf-8"?>
 <p:sld xmlns:a="http://schemas.openxmlformats.org/drawingml/2006/main" xmlns:p="http://schemas.openxmlformats.org/presentationml/2006/main" xmlns:r="http://schemas.openxmlformats.org/officeDocument/2006/relationships">
   <p:cSld>
+    <p:bg>
+      <p:bgPr>
+        <a:solidFill>
+          <a:srgbClr val="0B0B0B"/>
+        </a:solidFill>
+        <a:effectLst/>
+      </p:bgPr>
+    </p:bg>
     <p:spTree>
       <p:nvGrpSpPr>
         <p:cNvPr id="1" name=""/>
@@ -3166,6 +3198,14 @@
           <a:bodyPr/>
           <a:lstStyle/>
           <a:p>
+            <a:pPr>
+              <a:defRPr sz="3200" b="1">
+                <a:solidFill>
+                  <a:srgbClr val="FFDD22"/>
+                </a:solidFill>
+                <a:latin typeface="Calibri"/>
+              </a:defRPr>
+            </a:pPr>
             <a:r>
               <a:t>Progress</a:t>
             </a:r>
@@ -3187,11 +3227,27 @@
           <a:bodyPr/>
           <a:lstStyle/>
           <a:p>
+            <a:pPr>
+              <a:defRPr sz="2000" b="0">
+                <a:solidFill>
+                  <a:srgbClr val="F2F2ED"/>
+                </a:solidFill>
+                <a:latin typeface="Calibri"/>
+              </a:defRPr>
+            </a:pPr>
             <a:r>
               <a:t>Completed</a:t>
             </a:r>
           </a:p>
           <a:p>
+            <a:pPr>
+              <a:defRPr sz="2000" b="0">
+                <a:solidFill>
+                  <a:srgbClr val="F2F2ED"/>
+                </a:solidFill>
+                <a:latin typeface="Calibri"/>
+              </a:defRPr>
+            </a:pPr>
             <a:r>
               <a:t>In progress</a:t>
             </a:r>
@@ -3209,6 +3265,14 @@
 <file path=ppt/slides/slide3.xml><?xml version="1.0" encoding="utf-8"?>
 <p:sld xmlns:a="http://schemas.openxmlformats.org/drawingml/2006/main" xmlns:p="http://schemas.openxmlformats.org/presentationml/2006/main" xmlns:r="http://schemas.openxmlformats.org/officeDocument/2006/relationships">
   <p:cSld>
+    <p:bg>
+      <p:bgPr>
+        <a:solidFill>
+          <a:srgbClr val="0B0B0B"/>
+        </a:solidFill>
+        <a:effectLst/>
+      </p:bgPr>
+    </p:bg>
     <p:spTree>
       <p:nvGrpSpPr>
         <p:cNvPr id="1" name=""/>
@@ -3231,6 +3295,14 @@
           <a:bodyPr/>
           <a:lstStyle/>
           <a:p>
+            <a:pPr>
+              <a:defRPr sz="3200" b="1">
+                <a:solidFill>
+                  <a:srgbClr val="FFDD22"/>
+                </a:solidFill>
+                <a:latin typeface="Calibri"/>
+              </a:defRPr>
+            </a:pPr>
             <a:r>
               <a:t>Risks</a:t>
             </a:r>
@@ -3252,6 +3324,14 @@
           <a:bodyPr/>
           <a:lstStyle/>
           <a:p>
+            <a:pPr>
+              <a:defRPr sz="2000" b="0">
+                <a:solidFill>
+                  <a:srgbClr val="F2F2ED"/>
+                </a:solidFill>
+                <a:latin typeface="Calibri"/>
+              </a:defRPr>
+            </a:pPr>
             <a:r>
               <a:t>Risk · Impact · Mitigation</a:t>
             </a:r>
@@ -3269,6 +3349,14 @@
 <file path=ppt/slides/slide4.xml><?xml version="1.0" encoding="utf-8"?>
 <p:sld xmlns:a="http://schemas.openxmlformats.org/drawingml/2006/main" xmlns:p="http://schemas.openxmlformats.org/presentationml/2006/main" xmlns:r="http://schemas.openxmlformats.org/officeDocument/2006/relationships">
   <p:cSld>
+    <p:bg>
+      <p:bgPr>
+        <a:solidFill>
+          <a:srgbClr val="0B0B0B"/>
+        </a:solidFill>
+        <a:effectLst/>
+      </p:bgPr>
+    </p:bg>
     <p:spTree>
       <p:nvGrpSpPr>
         <p:cNvPr id="1" name=""/>
@@ -3291,6 +3379,14 @@
           <a:bodyPr/>
           <a:lstStyle/>
           <a:p>
+            <a:pPr>
+              <a:defRPr sz="3200" b="1">
+                <a:solidFill>
+                  <a:srgbClr val="FFDD22"/>
+                </a:solidFill>
+                <a:latin typeface="Calibri"/>
+              </a:defRPr>
+            </a:pPr>
             <a:r>
               <a:t>Next milestone</a:t>
             </a:r>
@@ -3312,6 +3408,14 @@
           <a:bodyPr/>
           <a:lstStyle/>
           <a:p>
+            <a:pPr>
+              <a:defRPr sz="2000" b="0">
+                <a:solidFill>
+                  <a:srgbClr val="F2F2ED"/>
+                </a:solidFill>
+                <a:latin typeface="Calibri"/>
+              </a:defRPr>
+            </a:pPr>
             <a:r>
               <a:t>Deliverable · Owner · Date</a:t>
             </a:r>
